--- a/neerlandais1/powerpoints/Module_19_Het_imperfectum.pptx
+++ b/neerlandais1/powerpoints/Module_19_Het_imperfectum.pptx
@@ -133,18 +133,18 @@
   <p:extLst>
     <p:ext uri="{521415D9-36F7-43E2-AB2F-B90AF26B5E84}">
       <p14:sectionLst xmlns:p14="http://schemas.microsoft.com/office/powerpoint/2010/main">
-        <p14:section name="Ouverture" id="{0eac0e62-2dee-69d2-3502-d51e87e7dde8}">
+        <p14:section name="Ouverture" id="{2fa631ba-873f-ef06-ed67-05fe5990530d}">
           <p14:sldIdLst>
             <p14:sldId id="256"/>
           </p14:sldIdLst>
         </p14:section>
-        <p14:section name="Découvrir" id="{a28f5d0b-0067-f55a-dd34-35930b42e1ff}">
+        <p14:section name="Découvrir" id="{4c1ccc78-37f3-6413-acf0-805613d467c9}">
           <p14:sldIdLst>
             <p14:sldId id="257"/>
             <p14:sldId id="258"/>
           </p14:sldIdLst>
         </p14:section>
-        <p14:section name="Comprendre" id="{43ef2317-9caf-21f3-1cf5-2dcdc18a98f4}">
+        <p14:section name="Comprendre" id="{14b2c19a-af2e-9443-248e-7a4bf8aa5df6}">
           <p14:sldIdLst>
             <p14:sldId id="259"/>
             <p14:sldId id="260"/>
@@ -158,7 +158,7 @@
             <p14:sldId id="268"/>
           </p14:sldIdLst>
         </p14:section>
-        <p14:section name="JIJ NU ! — Oefeningen" id="{f52a242c-3883-8063-81f8-41c968da2cb6}">
+        <p14:section name="JIJ NU ! — Oefeningen" id="{fcce859d-e601-2200-cef1-f0b18e4c094b}">
           <p14:sldIdLst>
             <p14:sldId id="269"/>
             <p14:sldId id="270"/>
@@ -175,7 +175,7 @@
             <p14:sldId id="281"/>
           </p14:sldIdLst>
         </p14:section>
-        <p14:section name="Clôture" id="{8b90998c-878e-2a2c-3fdc-c81803430fbf}">
+        <p14:section name="Clôture" id="{dc347185-d161-cf52-8733-ddd956b9ff8f}">
           <p14:sldIdLst>
             <p14:sldId id="282"/>
           </p14:sldIdLst>
@@ -2280,12 +2280,12 @@
           <a:p>
             <a:r>
               <a:rPr lang="en-US" dirty="0"/>
-              <a:t>Objectif : Vérifier les 3 objectifs et clore le parcours Néerlandais 1.
+              <a:t>Objectif : Vérifier les 3 objectifs et clore les blocs 1 à 4.
 Réponses :
 1. werkte · woonden.
 2. was · had · ging.
 3. Toen ik klein was, speelde ik voetbal.
-Bilan : faites relire la frise des 19 modules et choisir un module à retravailler. En Néerlandais 2 : les relatives, om … te, l'adjectif, les autres conjonctions, hoeven te, le conditionnel (zou).</a:t>
+Bilan : faites relire la frise des 19 modules et choisir un module à retravailler. Bloc 5 : les possessifs et démonstratifs (M20), l'adjectif (M21), les relatifs (M22), er / daar / waar (M23) et les particules modales (M24, bilan final du parcours).</a:t>
             </a:r>
             <a:endParaRPr lang="en-US" dirty="0"/>
           </a:p>
@@ -3806,7 +3806,7 @@
                   <a:srgbClr val="FFFFFF"/>
                 </a:solidFill>
               </a:rPr>
-              <a:t>MODULE 19 / 19</a:t>
+              <a:t>MODULE 19 / 24</a:t>
             </a:r>
             <a:endParaRPr lang="en-US" sz="1400" dirty="0"/>
           </a:p>
@@ -27812,7 +27812,7 @@
                   <a:schemeClr val="tx2"/>
                 </a:solidFill>
               </a:rPr>
-              <a:t>Ticket de sortie et bilan du parcours</a:t>
+              <a:t>Ticket de sortie et bilan du bloc 4</a:t>
             </a:r>
             <a:endParaRPr lang="en-US" sz="3000" dirty="0"/>
           </a:p>
@@ -28848,7 +28848,7 @@
                   <a:schemeClr val="bg1"/>
                 </a:solidFill>
               </a:rPr>
-              <a:t>Proficiat! Néerlandais 1 is klaar.</a:t>
+              <a:t>Proficiat! Bloc 4 is klaar.</a:t>
             </a:r>
             <a:r>
               <a:rPr lang="en-US" sz="1800" dirty="0">
@@ -28856,7 +28856,15 @@
                   <a:schemeClr val="bg1"/>
                 </a:solidFill>
               </a:rPr>
-              <a:t> — Volgende stap : Néerlandais 2</a:t>
+              <a:t> — Volgende stap : bloc 5, M20 </a:t>
+            </a:r>
+            <a:r>
+              <a:rPr lang="en-US" sz="1800" i="1" dirty="0">
+                <a:solidFill>
+                  <a:schemeClr val="bg1"/>
+                </a:solidFill>
+              </a:rPr>
+              <a:t>Van wie is dit?</a:t>
             </a:r>
             <a:endParaRPr lang="en-US" sz="1800" dirty="0"/>
           </a:p>
@@ -28892,7 +28900,7 @@
                   <a:schemeClr val="accent5"/>
                 </a:solidFill>
               </a:rPr>
-              <a:t>NÉERLANDAIS 1 · 19 MODULES</a:t>
+              <a:t>BLOCS 1 À 4 · 19 MODULES</a:t>
             </a:r>
             <a:endParaRPr lang="en-US" sz="1200" dirty="0"/>
           </a:p>

--- a/neerlandais1/powerpoints/Module_19_Het_imperfectum.pptx
+++ b/neerlandais1/powerpoints/Module_19_Het_imperfectum.pptx
@@ -133,18 +133,18 @@
   <p:extLst>
     <p:ext uri="{521415D9-36F7-43E2-AB2F-B90AF26B5E84}">
       <p14:sectionLst xmlns:p14="http://schemas.microsoft.com/office/powerpoint/2010/main">
-        <p14:section name="Ouverture" id="{2fa631ba-873f-ef06-ed67-05fe5990530d}">
+        <p14:section name="Ouverture" id="{4ae295da-42b3-623d-78eb-27207d8ebf46}">
           <p14:sldIdLst>
             <p14:sldId id="256"/>
           </p14:sldIdLst>
         </p14:section>
-        <p14:section name="Découvrir" id="{4c1ccc78-37f3-6413-acf0-805613d467c9}">
+        <p14:section name="Découvrir" id="{2039fb16-1ca4-fbf6-165d-178d0ee68a48}">
           <p14:sldIdLst>
             <p14:sldId id="257"/>
             <p14:sldId id="258"/>
           </p14:sldIdLst>
         </p14:section>
-        <p14:section name="Comprendre" id="{14b2c19a-af2e-9443-248e-7a4bf8aa5df6}">
+        <p14:section name="Comprendre" id="{17de8920-3df0-47c2-a292-9191fe95e610}">
           <p14:sldIdLst>
             <p14:sldId id="259"/>
             <p14:sldId id="260"/>
@@ -158,7 +158,7 @@
             <p14:sldId id="268"/>
           </p14:sldIdLst>
         </p14:section>
-        <p14:section name="JIJ NU ! — Oefeningen" id="{fcce859d-e601-2200-cef1-f0b18e4c094b}">
+        <p14:section name="JIJ NU ! — Oefeningen" id="{b4c87192-e8ad-a9b6-600c-e4b66b4c2e6a}">
           <p14:sldIdLst>
             <p14:sldId id="269"/>
             <p14:sldId id="270"/>
@@ -175,7 +175,7 @@
             <p14:sldId id="281"/>
           </p14:sldIdLst>
         </p14:section>
-        <p14:section name="Clôture" id="{dc347185-d161-cf52-8733-ddd956b9ff8f}">
+        <p14:section name="Clôture" id="{38f00759-581e-527d-a07c-e6ebc4d3e017}">
           <p14:sldIdLst>
             <p14:sldId id="282"/>
           </p14:sldIdLst>
@@ -3806,7 +3806,7 @@
                   <a:srgbClr val="FFFFFF"/>
                 </a:solidFill>
               </a:rPr>
-              <a:t>MODULE 19 / 24</a:t>
+              <a:t>MODULE 19 / 29</a:t>
             </a:r>
             <a:endParaRPr lang="en-US" sz="1400" dirty="0"/>
           </a:p>

--- a/neerlandais1/powerpoints/Module_19_Het_imperfectum.pptx
+++ b/neerlandais1/powerpoints/Module_19_Het_imperfectum.pptx
@@ -133,18 +133,18 @@
   <p:extLst>
     <p:ext uri="{521415D9-36F7-43E2-AB2F-B90AF26B5E84}">
       <p14:sectionLst xmlns:p14="http://schemas.microsoft.com/office/powerpoint/2010/main">
-        <p14:section name="Ouverture" id="{4ae295da-42b3-623d-78eb-27207d8ebf46}">
+        <p14:section name="Ouverture" id="{c41baf8c-307e-af2c-d905-f62aae819be1}">
           <p14:sldIdLst>
             <p14:sldId id="256"/>
           </p14:sldIdLst>
         </p14:section>
-        <p14:section name="Découvrir" id="{2039fb16-1ca4-fbf6-165d-178d0ee68a48}">
+        <p14:section name="Découvrir" id="{c4de7eff-3102-24ae-9c78-d2cd050e93fd}">
           <p14:sldIdLst>
             <p14:sldId id="257"/>
             <p14:sldId id="258"/>
           </p14:sldIdLst>
         </p14:section>
-        <p14:section name="Comprendre" id="{17de8920-3df0-47c2-a292-9191fe95e610}">
+        <p14:section name="Comprendre" id="{ecb8ddbb-3780-50ef-b513-2c5c0a6a775e}">
           <p14:sldIdLst>
             <p14:sldId id="259"/>
             <p14:sldId id="260"/>
@@ -158,7 +158,7 @@
             <p14:sldId id="268"/>
           </p14:sldIdLst>
         </p14:section>
-        <p14:section name="JIJ NU ! — Oefeningen" id="{b4c87192-e8ad-a9b6-600c-e4b66b4c2e6a}">
+        <p14:section name="JIJ NU ! — Oefeningen" id="{dfe7c050-588f-3118-3eea-9a20ec15c8a7}">
           <p14:sldIdLst>
             <p14:sldId id="269"/>
             <p14:sldId id="270"/>
@@ -175,7 +175,7 @@
             <p14:sldId id="281"/>
           </p14:sldIdLst>
         </p14:section>
-        <p14:section name="Clôture" id="{38f00759-581e-527d-a07c-e6ebc4d3e017}">
+        <p14:section name="Clôture" id="{dde020c3-d01c-565d-5549-321da1e43b67}">
           <p14:sldIdLst>
             <p14:sldId id="282"/>
           </p14:sldIdLst>
@@ -3806,7 +3806,7 @@
                   <a:srgbClr val="FFFFFF"/>
                 </a:solidFill>
               </a:rPr>
-              <a:t>MODULE 19 / 29</a:t>
+              <a:t>MODULE 19 / 32</a:t>
             </a:r>
             <a:endParaRPr lang="en-US" sz="1400" dirty="0"/>
           </a:p>

--- a/neerlandais1/powerpoints/Module_19_Het_imperfectum.pptx
+++ b/neerlandais1/powerpoints/Module_19_Het_imperfectum.pptx
@@ -133,18 +133,18 @@
   <p:extLst>
     <p:ext uri="{521415D9-36F7-43E2-AB2F-B90AF26B5E84}">
       <p14:sectionLst xmlns:p14="http://schemas.microsoft.com/office/powerpoint/2010/main">
-        <p14:section name="Ouverture" id="{c41baf8c-307e-af2c-d905-f62aae819be1}">
+        <p14:section name="Ouverture" id="{4a5dfff9-1ef8-6c81-138d-682e049a97e2}">
           <p14:sldIdLst>
             <p14:sldId id="256"/>
           </p14:sldIdLst>
         </p14:section>
-        <p14:section name="Découvrir" id="{c4de7eff-3102-24ae-9c78-d2cd050e93fd}">
+        <p14:section name="Découvrir" id="{a8466169-0ad2-6d0e-17eb-9e4fc63837fc}">
           <p14:sldIdLst>
             <p14:sldId id="257"/>
             <p14:sldId id="258"/>
           </p14:sldIdLst>
         </p14:section>
-        <p14:section name="Comprendre" id="{ecb8ddbb-3780-50ef-b513-2c5c0a6a775e}">
+        <p14:section name="Comprendre" id="{5d857f40-bac0-b699-84ca-99f71ccabe68}">
           <p14:sldIdLst>
             <p14:sldId id="259"/>
             <p14:sldId id="260"/>
@@ -158,7 +158,7 @@
             <p14:sldId id="268"/>
           </p14:sldIdLst>
         </p14:section>
-        <p14:section name="JIJ NU ! — Oefeningen" id="{dfe7c050-588f-3118-3eea-9a20ec15c8a7}">
+        <p14:section name="JIJ NU ! — Oefeningen" id="{8c4ae4aa-5ca3-24a1-50a5-37990ed1e01d}">
           <p14:sldIdLst>
             <p14:sldId id="269"/>
             <p14:sldId id="270"/>
@@ -175,7 +175,7 @@
             <p14:sldId id="281"/>
           </p14:sldIdLst>
         </p14:section>
-        <p14:section name="Clôture" id="{dde020c3-d01c-565d-5549-321da1e43b67}">
+        <p14:section name="Clôture" id="{2c2e7f07-9239-a3b2-6935-77af7d249ace}">
           <p14:sldIdLst>
             <p14:sldId id="282"/>
           </p14:sldIdLst>

--- a/neerlandais1/powerpoints/Module_19_Het_imperfectum.pptx
+++ b/neerlandais1/powerpoints/Module_19_Het_imperfectum.pptx
@@ -133,18 +133,18 @@
   <p:extLst>
     <p:ext uri="{521415D9-36F7-43E2-AB2F-B90AF26B5E84}">
       <p14:sectionLst xmlns:p14="http://schemas.microsoft.com/office/powerpoint/2010/main">
-        <p14:section name="Ouverture" id="{4a5dfff9-1ef8-6c81-138d-682e049a97e2}">
+        <p14:section name="Ouverture" id="{7c15a878-9028-7c41-7c8f-d329138f5541}">
           <p14:sldIdLst>
             <p14:sldId id="256"/>
           </p14:sldIdLst>
         </p14:section>
-        <p14:section name="Découvrir" id="{a8466169-0ad2-6d0e-17eb-9e4fc63837fc}">
+        <p14:section name="Découvrir" id="{2386fe74-bb6f-660c-2d68-f8e868748ab2}">
           <p14:sldIdLst>
             <p14:sldId id="257"/>
             <p14:sldId id="258"/>
           </p14:sldIdLst>
         </p14:section>
-        <p14:section name="Comprendre" id="{5d857f40-bac0-b699-84ca-99f71ccabe68}">
+        <p14:section name="Comprendre" id="{4f3f196c-0cd6-ed18-cefc-d4c87621cef0}">
           <p14:sldIdLst>
             <p14:sldId id="259"/>
             <p14:sldId id="260"/>
@@ -158,7 +158,7 @@
             <p14:sldId id="268"/>
           </p14:sldIdLst>
         </p14:section>
-        <p14:section name="JIJ NU ! — Oefeningen" id="{8c4ae4aa-5ca3-24a1-50a5-37990ed1e01d}">
+        <p14:section name="JIJ NU ! — Oefeningen" id="{ff138737-914d-7dde-16ea-ae27d1fefe19}">
           <p14:sldIdLst>
             <p14:sldId id="269"/>
             <p14:sldId id="270"/>
@@ -175,7 +175,7 @@
             <p14:sldId id="281"/>
           </p14:sldIdLst>
         </p14:section>
-        <p14:section name="Clôture" id="{2c2e7f07-9239-a3b2-6935-77af7d249ace}">
+        <p14:section name="Clôture" id="{99aab987-46ea-dfa0-2006-238f29f5b8c4}">
           <p14:sldIdLst>
             <p14:sldId id="282"/>
           </p14:sldIdLst>

--- a/neerlandais1/powerpoints/Module_19_Het_imperfectum.pptx
+++ b/neerlandais1/powerpoints/Module_19_Het_imperfectum.pptx
@@ -133,18 +133,18 @@
   <p:extLst>
     <p:ext uri="{521415D9-36F7-43E2-AB2F-B90AF26B5E84}">
       <p14:sectionLst xmlns:p14="http://schemas.microsoft.com/office/powerpoint/2010/main">
-        <p14:section name="Ouverture" id="{7c15a878-9028-7c41-7c8f-d329138f5541}">
+        <p14:section name="Ouverture" id="{24884ae7-e336-72a1-2f3b-a4cef849c874}">
           <p14:sldIdLst>
             <p14:sldId id="256"/>
           </p14:sldIdLst>
         </p14:section>
-        <p14:section name="Découvrir" id="{2386fe74-bb6f-660c-2d68-f8e868748ab2}">
+        <p14:section name="Découvrir" id="{6a4f7ea9-8957-39a6-678a-04f0e0d6f546}">
           <p14:sldIdLst>
             <p14:sldId id="257"/>
             <p14:sldId id="258"/>
           </p14:sldIdLst>
         </p14:section>
-        <p14:section name="Comprendre" id="{4f3f196c-0cd6-ed18-cefc-d4c87621cef0}">
+        <p14:section name="Comprendre" id="{4b2c7b3c-6789-f123-3cc8-f9ff7f01ea7c}">
           <p14:sldIdLst>
             <p14:sldId id="259"/>
             <p14:sldId id="260"/>
@@ -158,7 +158,7 @@
             <p14:sldId id="268"/>
           </p14:sldIdLst>
         </p14:section>
-        <p14:section name="JIJ NU ! — Oefeningen" id="{ff138737-914d-7dde-16ea-ae27d1fefe19}">
+        <p14:section name="JIJ NU ! — Oefeningen" id="{d8121b95-ba89-c667-b5df-0cb115ef8148}">
           <p14:sldIdLst>
             <p14:sldId id="269"/>
             <p14:sldId id="270"/>
@@ -175,7 +175,7 @@
             <p14:sldId id="281"/>
           </p14:sldIdLst>
         </p14:section>
-        <p14:section name="Clôture" id="{99aab987-46ea-dfa0-2006-238f29f5b8c4}">
+        <p14:section name="Clôture" id="{3695b04d-69ed-6ba8-1bfc-42803b595329}">
           <p14:sldIdLst>
             <p14:sldId id="282"/>
           </p14:sldIdLst>

--- a/neerlandais1/powerpoints/Module_19_Het_imperfectum.pptx
+++ b/neerlandais1/powerpoints/Module_19_Het_imperfectum.pptx
@@ -133,18 +133,18 @@
   <p:extLst>
     <p:ext uri="{521415D9-36F7-43E2-AB2F-B90AF26B5E84}">
       <p14:sectionLst xmlns:p14="http://schemas.microsoft.com/office/powerpoint/2010/main">
-        <p14:section name="Ouverture" id="{24884ae7-e336-72a1-2f3b-a4cef849c874}">
+        <p14:section name="Ouverture" id="{68ead3ed-8d8d-63c6-cd44-a9bb59b0bd2c}">
           <p14:sldIdLst>
             <p14:sldId id="256"/>
           </p14:sldIdLst>
         </p14:section>
-        <p14:section name="Découvrir" id="{6a4f7ea9-8957-39a6-678a-04f0e0d6f546}">
+        <p14:section name="Découvrir" id="{5bc5caa1-8e35-a0b4-7006-219c106e20e1}">
           <p14:sldIdLst>
             <p14:sldId id="257"/>
             <p14:sldId id="258"/>
           </p14:sldIdLst>
         </p14:section>
-        <p14:section name="Comprendre" id="{4b2c7b3c-6789-f123-3cc8-f9ff7f01ea7c}">
+        <p14:section name="Comprendre" id="{d624422b-a3d5-d119-c3a7-79da368985b4}">
           <p14:sldIdLst>
             <p14:sldId id="259"/>
             <p14:sldId id="260"/>
@@ -158,7 +158,7 @@
             <p14:sldId id="268"/>
           </p14:sldIdLst>
         </p14:section>
-        <p14:section name="JIJ NU ! — Oefeningen" id="{d8121b95-ba89-c667-b5df-0cb115ef8148}">
+        <p14:section name="JIJ NU ! — Oefeningen" id="{1128be63-4853-77d1-e37d-e6a2d88908f0}">
           <p14:sldIdLst>
             <p14:sldId id="269"/>
             <p14:sldId id="270"/>
@@ -175,7 +175,7 @@
             <p14:sldId id="281"/>
           </p14:sldIdLst>
         </p14:section>
-        <p14:section name="Clôture" id="{3695b04d-69ed-6ba8-1bfc-42803b595329}">
+        <p14:section name="Clôture" id="{222d8afa-80f8-4b13-c877-5ed5f2725391}">
           <p14:sldIdLst>
             <p14:sldId id="282"/>
           </p14:sldIdLst>

--- a/neerlandais1/powerpoints/Module_19_Het_imperfectum.pptx
+++ b/neerlandais1/powerpoints/Module_19_Het_imperfectum.pptx
@@ -133,18 +133,18 @@
   <p:extLst>
     <p:ext uri="{521415D9-36F7-43E2-AB2F-B90AF26B5E84}">
       <p14:sectionLst xmlns:p14="http://schemas.microsoft.com/office/powerpoint/2010/main">
-        <p14:section name="Ouverture" id="{68ead3ed-8d8d-63c6-cd44-a9bb59b0bd2c}">
+        <p14:section name="Ouverture" id="{ea800669-7b23-27d2-cb34-cbac0dfe1732}">
           <p14:sldIdLst>
             <p14:sldId id="256"/>
           </p14:sldIdLst>
         </p14:section>
-        <p14:section name="Découvrir" id="{5bc5caa1-8e35-a0b4-7006-219c106e20e1}">
+        <p14:section name="Découvrir" id="{695bc77f-71ee-2af9-f964-217166b7b130}">
           <p14:sldIdLst>
             <p14:sldId id="257"/>
             <p14:sldId id="258"/>
           </p14:sldIdLst>
         </p14:section>
-        <p14:section name="Comprendre" id="{d624422b-a3d5-d119-c3a7-79da368985b4}">
+        <p14:section name="Comprendre" id="{7242ffb6-9246-71d8-6ec9-cf4a8a23ab4f}">
           <p14:sldIdLst>
             <p14:sldId id="259"/>
             <p14:sldId id="260"/>
@@ -158,7 +158,7 @@
             <p14:sldId id="268"/>
           </p14:sldIdLst>
         </p14:section>
-        <p14:section name="JIJ NU ! — Oefeningen" id="{1128be63-4853-77d1-e37d-e6a2d88908f0}">
+        <p14:section name="JIJ NU ! — Oefeningen" id="{dc4dffba-c2f6-6a56-7b13-471d63ac8ace}">
           <p14:sldIdLst>
             <p14:sldId id="269"/>
             <p14:sldId id="270"/>
@@ -175,7 +175,7 @@
             <p14:sldId id="281"/>
           </p14:sldIdLst>
         </p14:section>
-        <p14:section name="Clôture" id="{222d8afa-80f8-4b13-c877-5ed5f2725391}">
+        <p14:section name="Clôture" id="{38e65618-0635-7fbe-0f3d-084c634a4c9f}">
           <p14:sldIdLst>
             <p14:sldId id="282"/>
           </p14:sldIdLst>

--- a/neerlandais1/powerpoints/Module_19_Het_imperfectum.pptx
+++ b/neerlandais1/powerpoints/Module_19_Het_imperfectum.pptx
@@ -133,18 +133,18 @@
   <p:extLst>
     <p:ext uri="{521415D9-36F7-43E2-AB2F-B90AF26B5E84}">
       <p14:sectionLst xmlns:p14="http://schemas.microsoft.com/office/powerpoint/2010/main">
-        <p14:section name="Ouverture" id="{ea800669-7b23-27d2-cb34-cbac0dfe1732}">
+        <p14:section name="Ouverture" id="{5e4d4d5e-06c5-7529-bd99-625c3a181fc7}">
           <p14:sldIdLst>
             <p14:sldId id="256"/>
           </p14:sldIdLst>
         </p14:section>
-        <p14:section name="Découvrir" id="{695bc77f-71ee-2af9-f964-217166b7b130}">
+        <p14:section name="Découvrir" id="{8f1de223-1a92-85c2-60f8-1203d83c03fc}">
           <p14:sldIdLst>
             <p14:sldId id="257"/>
             <p14:sldId id="258"/>
           </p14:sldIdLst>
         </p14:section>
-        <p14:section name="Comprendre" id="{7242ffb6-9246-71d8-6ec9-cf4a8a23ab4f}">
+        <p14:section name="Comprendre" id="{cf6131aa-fdee-1fcb-d3c5-e3537a92b248}">
           <p14:sldIdLst>
             <p14:sldId id="259"/>
             <p14:sldId id="260"/>
@@ -158,7 +158,7 @@
             <p14:sldId id="268"/>
           </p14:sldIdLst>
         </p14:section>
-        <p14:section name="JIJ NU ! — Oefeningen" id="{dc4dffba-c2f6-6a56-7b13-471d63ac8ace}">
+        <p14:section name="JIJ NU ! — Oefeningen" id="{0e5e3e43-9063-aad9-d66a-460ef4ee8d47}">
           <p14:sldIdLst>
             <p14:sldId id="269"/>
             <p14:sldId id="270"/>
@@ -175,7 +175,7 @@
             <p14:sldId id="281"/>
           </p14:sldIdLst>
         </p14:section>
-        <p14:section name="Clôture" id="{38e65618-0635-7fbe-0f3d-084c634a4c9f}">
+        <p14:section name="Clôture" id="{ee3ab314-a686-bc8c-2ed7-ec447bc43fee}">
           <p14:sldIdLst>
             <p14:sldId id="282"/>
           </p14:sldIdLst>

--- a/neerlandais1/powerpoints/Module_19_Het_imperfectum.pptx
+++ b/neerlandais1/powerpoints/Module_19_Het_imperfectum.pptx
@@ -133,18 +133,18 @@
   <p:extLst>
     <p:ext uri="{521415D9-36F7-43E2-AB2F-B90AF26B5E84}">
       <p14:sectionLst xmlns:p14="http://schemas.microsoft.com/office/powerpoint/2010/main">
-        <p14:section name="Ouverture" id="{5e4d4d5e-06c5-7529-bd99-625c3a181fc7}">
+        <p14:section name="Ouverture" id="{9c21135d-9f40-d2fc-b06e-8d2829d6dbec}">
           <p14:sldIdLst>
             <p14:sldId id="256"/>
           </p14:sldIdLst>
         </p14:section>
-        <p14:section name="Découvrir" id="{8f1de223-1a92-85c2-60f8-1203d83c03fc}">
+        <p14:section name="Découvrir" id="{540b3f07-25cb-b903-43d3-bc5dfc1da3c5}">
           <p14:sldIdLst>
             <p14:sldId id="257"/>
             <p14:sldId id="258"/>
           </p14:sldIdLst>
         </p14:section>
-        <p14:section name="Comprendre" id="{cf6131aa-fdee-1fcb-d3c5-e3537a92b248}">
+        <p14:section name="Comprendre" id="{e19f32c0-0187-d4dc-bce2-614eca28c394}">
           <p14:sldIdLst>
             <p14:sldId id="259"/>
             <p14:sldId id="260"/>
@@ -158,7 +158,7 @@
             <p14:sldId id="268"/>
           </p14:sldIdLst>
         </p14:section>
-        <p14:section name="JIJ NU ! — Oefeningen" id="{0e5e3e43-9063-aad9-d66a-460ef4ee8d47}">
+        <p14:section name="JIJ NU ! — Oefeningen" id="{ebeff033-f756-14e8-af4f-447aabf47c51}">
           <p14:sldIdLst>
             <p14:sldId id="269"/>
             <p14:sldId id="270"/>
@@ -175,7 +175,7 @@
             <p14:sldId id="281"/>
           </p14:sldIdLst>
         </p14:section>
-        <p14:section name="Clôture" id="{ee3ab314-a686-bc8c-2ed7-ec447bc43fee}">
+        <p14:section name="Clôture" id="{add2a858-4848-70d1-1f8f-16c28e910723}">
           <p14:sldIdLst>
             <p14:sldId id="282"/>
           </p14:sldIdLst>

--- a/neerlandais1/powerpoints/Module_19_Het_imperfectum.pptx
+++ b/neerlandais1/powerpoints/Module_19_Het_imperfectum.pptx
@@ -133,18 +133,18 @@
   <p:extLst>
     <p:ext uri="{521415D9-36F7-43E2-AB2F-B90AF26B5E84}">
       <p14:sectionLst xmlns:p14="http://schemas.microsoft.com/office/powerpoint/2010/main">
-        <p14:section name="Ouverture" id="{9c21135d-9f40-d2fc-b06e-8d2829d6dbec}">
+        <p14:section name="Ouverture" id="{fc8b477e-d40c-4314-025f-f5bff3f4f942}">
           <p14:sldIdLst>
             <p14:sldId id="256"/>
           </p14:sldIdLst>
         </p14:section>
-        <p14:section name="Découvrir" id="{540b3f07-25cb-b903-43d3-bc5dfc1da3c5}">
+        <p14:section name="Découvrir" id="{33213ef9-077f-1891-4b42-5261ef36df8b}">
           <p14:sldIdLst>
             <p14:sldId id="257"/>
             <p14:sldId id="258"/>
           </p14:sldIdLst>
         </p14:section>
-        <p14:section name="Comprendre" id="{e19f32c0-0187-d4dc-bce2-614eca28c394}">
+        <p14:section name="Comprendre" id="{6f1e2077-624d-0bbf-7483-937ca5a97146}">
           <p14:sldIdLst>
             <p14:sldId id="259"/>
             <p14:sldId id="260"/>
@@ -158,7 +158,7 @@
             <p14:sldId id="268"/>
           </p14:sldIdLst>
         </p14:section>
-        <p14:section name="JIJ NU ! — Oefeningen" id="{ebeff033-f756-14e8-af4f-447aabf47c51}">
+        <p14:section name="JIJ NU ! — Oefeningen" id="{7f08e53d-b2ec-064d-6b60-81c7d69e73d6}">
           <p14:sldIdLst>
             <p14:sldId id="269"/>
             <p14:sldId id="270"/>
@@ -175,7 +175,7 @@
             <p14:sldId id="281"/>
           </p14:sldIdLst>
         </p14:section>
-        <p14:section name="Clôture" id="{add2a858-4848-70d1-1f8f-16c28e910723}">
+        <p14:section name="Clôture" id="{ef5ad0d8-07e2-ee86-591d-21dcc66e212d}">
           <p14:sldIdLst>
             <p14:sldId id="282"/>
           </p14:sldIdLst>
